--- a/samples/ตัวอย่าง-นำเสนอบริษัท.pptx
+++ b/samples/ตัวอย่าง-นำเสนอบริษัท.pptx
@@ -3157,7 +3157,7 @@
               <a:rPr sz="1800" b="0">
                 <a:latin typeface="Sarabun"/>
               </a:rPr>
-              <a:t>บริษัท ตัวอย่างใจดี จำกัด (ข้อมูลสมมติ) · Sample Kindly Co., Ltd. (fictional)</a:t>
+              <a:t>บริษัท ตัวอย่างใจดี จำกัด (ข้อมูลสมมติ)  Sample Kindly Co., Ltd. (fictional)</a:t>
             </a:r>
           </a:p>
         </p:txBody>
